--- a/lecons/F4/10_F4_M1_L10_The_Tropical_Hot_Desert_Biome.pptx
+++ b/lecons/F4/10_F4_M1_L10_The_Tropical_Hot_Desert_Biome.pptx
@@ -13024,7 +13024,7 @@
               <a:buNone/>
             </a:pPr>
             <a:r>
-              <a:rPr lang="en-US" sz="4000" b="1" dirty="0">
+              <a:rPr lang="en-US" sz="3200" b="1" dirty="0">
                 <a:solidFill>
                   <a:srgbClr val="111111"/>
                 </a:solidFill>
@@ -13034,7 +13034,7 @@
               </a:rPr>
               <a:t>Topic: Conservation of World's Biomes and Resources</a:t>
             </a:r>
-            <a:endParaRPr lang="en-US" sz="4000" dirty="0"/>
+            <a:endParaRPr lang="en-US" sz="3200" dirty="0"/>
           </a:p>
           <a:p>
             <a:pPr algn="l" indent="0" marL="0">
@@ -13044,7 +13044,7 @@
               <a:buNone/>
             </a:pPr>
             <a:r>
-              <a:rPr lang="en-US" sz="4000" b="1" dirty="0">
+              <a:rPr lang="en-US" sz="3200" b="1" dirty="0">
                 <a:solidFill>
                   <a:srgbClr val="111111"/>
                 </a:solidFill>
@@ -13054,7 +13054,7 @@
               </a:rPr>
               <a:t>Sub-topic: Tropical Biomes and their Significance</a:t>
             </a:r>
-            <a:endParaRPr lang="en-US" sz="4000" dirty="0"/>
+            <a:endParaRPr lang="en-US" sz="3200" dirty="0"/>
           </a:p>
           <a:p>
             <a:pPr algn="l" indent="0" marL="0">
@@ -13064,7 +13064,7 @@
               <a:buNone/>
             </a:pPr>
             <a:r>
-              <a:rPr lang="en-US" sz="4000" b="1" dirty="0">
+              <a:rPr lang="en-US" sz="3200" b="1" dirty="0">
                 <a:solidFill>
                   <a:srgbClr val="990011"/>
                 </a:solidFill>
@@ -13074,7 +13074,7 @@
               </a:rPr>
               <a:t>Lesson 10: The Tropical Hot Desert Biome</a:t>
             </a:r>
-            <a:endParaRPr lang="en-US" sz="4000" dirty="0"/>
+            <a:endParaRPr lang="en-US" sz="3200" dirty="0"/>
           </a:p>
         </p:txBody>
       </p:sp>
